--- a/deck/Investment-Thesis-Factors.pptx
+++ b/deck/Investment-Thesis-Factors.pptx
@@ -5468,7 +5468,7 @@
                 <a:ea typeface="Arial" pitchFamily="34" charset="-122"/>
                 <a:cs typeface="Arial" pitchFamily="34" charset="-120"/>
               </a:rPr>
-              <a:t>A zero-cost collar (buy the 70% put, sell a ≈248% call) lifts the worst 1% to USD 70mn and keeps the median at 113.</a:t>
+              <a:t>A 70% put lifts the worst 1% to USD 70mn. Our note embeds it: 10.5% memory coupon, 100% back above 70%, never less than 70%.</a:t>
             </a:r>
             <a:endParaRPr lang="en-US" sz="1000" dirty="0"/>
           </a:p>
@@ -5507,7 +5507,7 @@
                 <a:ea typeface="Arial" pitchFamily="34" charset="-122"/>
                 <a:cs typeface="Arial" pitchFamily="34" charset="-120"/>
               </a:rPr>
-              <a:t>Realised vol: 63-day daily returns of the buy-and-hold portfolio; 5-year average of that series 22% (weekly-return vol 24.5%). Correlation: 13-week weekly returns. Collar priced in the team Monte Carlo without volatility skew (real quotes will be dearer).</a:t>
+              <a:t>Realised vol: 63-day daily returns of the buy-and-hold portfolio; 5-year average of that series 22% (weekly-return vol 24.5%). Correlation: 13-week weekly returns. Put and note priced in the team Monte Carlo without volatility skew (real quotes will be dearer).</a:t>
             </a:r>
             <a:endParaRPr lang="en-US" sz="800" dirty="0"/>
           </a:p>

--- a/deck/Investment-Thesis-Factors.pptx
+++ b/deck/Investment-Thesis-Factors.pptx
@@ -3234,7 +3234,7 @@
                           <a:ea typeface="Arial" pitchFamily="34" charset="-122"/>
                           <a:cs typeface="Arial" pitchFamily="34" charset="-120"/>
                         </a:rPr>
-                        <a:t>Fed hiked to 3.75–4.00% (16 Sep), ≈1-in-3 odds of another on 28 Oct; BoJ 1.25% (18 Sep); USD/JPY ≈158; 5Y USD funding 5.69%</a:t>
+                        <a:t>Fed hiked to 3.75–4.00% (16 Sep); dot plot median 4.125% to end-2027, cuts only from 2028; BoJ 1.25% (18 Sep); USD/JPY ≈158; 5Y USD funding 5.69%</a:t>
                       </a:r>
                       <a:endParaRPr lang="en-US" sz="950" dirty="0">
                         <a:latin typeface="Arial" charset="0"/>
